--- a/Week2/Week2_Slides.pptx
+++ b/Week2/Week2_Slides.pptx
@@ -13,8 +13,8 @@
     <p:sldId id="284" r:id="rId7"/>
     <p:sldId id="285" r:id="rId8"/>
     <p:sldId id="286" r:id="rId9"/>
-    <p:sldId id="287" r:id="rId10"/>
-    <p:sldId id="288" r:id="rId11"/>
+    <p:sldId id="288" r:id="rId10"/>
+    <p:sldId id="287" r:id="rId11"/>
     <p:sldId id="290" r:id="rId12"/>
     <p:sldId id="291" r:id="rId13"/>
     <p:sldId id="294" r:id="rId14"/>
@@ -128,6 +128,27 @@
 </p:presentation>
 </file>
 
+<file path=ppt/changesInfos/changesInfo1.xml><?xml version="1.0" encoding="utf-8"?>
+<pc:chgInfo xmlns:a="http://schemas.openxmlformats.org/drawingml/2006/main" xmlns:r="http://schemas.openxmlformats.org/officeDocument/2006/relationships" xmlns:ac="http://schemas.microsoft.com/office/drawing/2013/main/command" xmlns:pc="http://schemas.microsoft.com/office/powerpoint/2013/main/command">
+  <pc:docChgLst>
+    <pc:chgData name="Aditya Prakash" userId="63857794c4587b63" providerId="LiveId" clId="{F4E0E6A5-3C4E-4AB4-89B4-A462AE29BA05}"/>
+    <pc:docChg chg="modSld sldOrd">
+      <pc:chgData name="Aditya Prakash" userId="63857794c4587b63" providerId="LiveId" clId="{F4E0E6A5-3C4E-4AB4-89B4-A462AE29BA05}" dt="2025-02-20T17:04:15.314" v="1"/>
+      <pc:docMkLst>
+        <pc:docMk/>
+      </pc:docMkLst>
+      <pc:sldChg chg="ord">
+        <pc:chgData name="Aditya Prakash" userId="63857794c4587b63" providerId="LiveId" clId="{F4E0E6A5-3C4E-4AB4-89B4-A462AE29BA05}" dt="2025-02-20T17:04:15.314" v="1"/>
+        <pc:sldMkLst>
+          <pc:docMk/>
+          <pc:sldMk cId="4277104657" sldId="288"/>
+        </pc:sldMkLst>
+      </pc:sldChg>
+    </pc:docChg>
+  </pc:docChgLst>
+</pc:chgInfo>
+</file>
+
 <file path=ppt/slideLayouts/slideLayout1.xml><?xml version="1.0" encoding="utf-8"?>
 <p:sldLayout xmlns:a="http://schemas.openxmlformats.org/drawingml/2006/main" xmlns:r="http://schemas.openxmlformats.org/officeDocument/2006/relationships" xmlns:p="http://schemas.openxmlformats.org/presentationml/2006/main" type="title" preserve="1">
   <p:cSld name="Title Slide">
@@ -275,7 +296,7 @@
           <a:p>
             <a:fld id="{B8CBA91D-CA13-43C7-BDE8-E1CE1C707EA6}" type="datetimeFigureOut">
               <a:rPr lang="en-US" smtClean="0"/>
-              <a:t>2/13/2025</a:t>
+              <a:t>2/20/2025</a:t>
             </a:fld>
             <a:endParaRPr lang="en-US"/>
           </a:p>
@@ -473,7 +494,7 @@
           <a:p>
             <a:fld id="{B8CBA91D-CA13-43C7-BDE8-E1CE1C707EA6}" type="datetimeFigureOut">
               <a:rPr lang="en-US" smtClean="0"/>
-              <a:t>2/13/2025</a:t>
+              <a:t>2/20/2025</a:t>
             </a:fld>
             <a:endParaRPr lang="en-US"/>
           </a:p>
@@ -681,7 +702,7 @@
           <a:p>
             <a:fld id="{B8CBA91D-CA13-43C7-BDE8-E1CE1C707EA6}" type="datetimeFigureOut">
               <a:rPr lang="en-US" smtClean="0"/>
-              <a:t>2/13/2025</a:t>
+              <a:t>2/20/2025</a:t>
             </a:fld>
             <a:endParaRPr lang="en-US"/>
           </a:p>
@@ -879,7 +900,7 @@
           <a:p>
             <a:fld id="{B8CBA91D-CA13-43C7-BDE8-E1CE1C707EA6}" type="datetimeFigureOut">
               <a:rPr lang="en-US" smtClean="0"/>
-              <a:t>2/13/2025</a:t>
+              <a:t>2/20/2025</a:t>
             </a:fld>
             <a:endParaRPr lang="en-US"/>
           </a:p>
@@ -1154,7 +1175,7 @@
           <a:p>
             <a:fld id="{B8CBA91D-CA13-43C7-BDE8-E1CE1C707EA6}" type="datetimeFigureOut">
               <a:rPr lang="en-US" smtClean="0"/>
-              <a:t>2/13/2025</a:t>
+              <a:t>2/20/2025</a:t>
             </a:fld>
             <a:endParaRPr lang="en-US"/>
           </a:p>
@@ -1419,7 +1440,7 @@
           <a:p>
             <a:fld id="{B8CBA91D-CA13-43C7-BDE8-E1CE1C707EA6}" type="datetimeFigureOut">
               <a:rPr lang="en-US" smtClean="0"/>
-              <a:t>2/13/2025</a:t>
+              <a:t>2/20/2025</a:t>
             </a:fld>
             <a:endParaRPr lang="en-US"/>
           </a:p>
@@ -1831,7 +1852,7 @@
           <a:p>
             <a:fld id="{B8CBA91D-CA13-43C7-BDE8-E1CE1C707EA6}" type="datetimeFigureOut">
               <a:rPr lang="en-US" smtClean="0"/>
-              <a:t>2/13/2025</a:t>
+              <a:t>2/20/2025</a:t>
             </a:fld>
             <a:endParaRPr lang="en-US"/>
           </a:p>
@@ -1972,7 +1993,7 @@
           <a:p>
             <a:fld id="{B8CBA91D-CA13-43C7-BDE8-E1CE1C707EA6}" type="datetimeFigureOut">
               <a:rPr lang="en-US" smtClean="0"/>
-              <a:t>2/13/2025</a:t>
+              <a:t>2/20/2025</a:t>
             </a:fld>
             <a:endParaRPr lang="en-US"/>
           </a:p>
@@ -2085,7 +2106,7 @@
           <a:p>
             <a:fld id="{B8CBA91D-CA13-43C7-BDE8-E1CE1C707EA6}" type="datetimeFigureOut">
               <a:rPr lang="en-US" smtClean="0"/>
-              <a:t>2/13/2025</a:t>
+              <a:t>2/20/2025</a:t>
             </a:fld>
             <a:endParaRPr lang="en-US"/>
           </a:p>
@@ -2396,7 +2417,7 @@
           <a:p>
             <a:fld id="{B8CBA91D-CA13-43C7-BDE8-E1CE1C707EA6}" type="datetimeFigureOut">
               <a:rPr lang="en-US" smtClean="0"/>
-              <a:t>2/13/2025</a:t>
+              <a:t>2/20/2025</a:t>
             </a:fld>
             <a:endParaRPr lang="en-US"/>
           </a:p>
@@ -2684,7 +2705,7 @@
           <a:p>
             <a:fld id="{B8CBA91D-CA13-43C7-BDE8-E1CE1C707EA6}" type="datetimeFigureOut">
               <a:rPr lang="en-US" smtClean="0"/>
-              <a:t>2/13/2025</a:t>
+              <a:t>2/20/2025</a:t>
             </a:fld>
             <a:endParaRPr lang="en-US"/>
           </a:p>
@@ -2925,7 +2946,7 @@
           <a:p>
             <a:fld id="{B8CBA91D-CA13-43C7-BDE8-E1CE1C707EA6}" type="datetimeFigureOut">
               <a:rPr lang="en-US" smtClean="0"/>
-              <a:t>2/13/2025</a:t>
+              <a:t>2/20/2025</a:t>
             </a:fld>
             <a:endParaRPr lang="en-US"/>
           </a:p>
@@ -3554,7 +3575,7 @@
         <p:cNvPr id="1" name="">
           <a:extLst>
             <a:ext uri="{FF2B5EF4-FFF2-40B4-BE49-F238E27FC236}">
-              <a16:creationId xmlns:a16="http://schemas.microsoft.com/office/drawing/2014/main" id="{07FD455E-26B8-0442-EF75-70EF7D7D5312}"/>
+              <a16:creationId xmlns:a16="http://schemas.microsoft.com/office/drawing/2014/main" id="{62FFFE98-06B2-F3C3-670D-117743446329}"/>
             </a:ext>
           </a:extLst>
         </p:cNvPr>
@@ -3574,7 +3595,7 @@
           <p:cNvPr id="10" name="Rectangle 9">
             <a:extLst>
               <a:ext uri="{FF2B5EF4-FFF2-40B4-BE49-F238E27FC236}">
-                <a16:creationId xmlns:a16="http://schemas.microsoft.com/office/drawing/2014/main" id="{70A03FC1-7551-C682-4978-6FFBEE11C3DE}"/>
+                <a16:creationId xmlns:a16="http://schemas.microsoft.com/office/drawing/2014/main" id="{D951E9DC-B1AA-061D-0E8C-924133ED5A39}"/>
               </a:ext>
               <a:ext uri="{C183D7F6-B498-43B3-948B-1728B52AA6E4}">
                 <adec:decorative xmlns:adec="http://schemas.microsoft.com/office/drawing/2017/decorative" val="1"/>
@@ -3634,7 +3655,7 @@
           <p:cNvPr id="6" name="TextBox 5">
             <a:extLst>
               <a:ext uri="{FF2B5EF4-FFF2-40B4-BE49-F238E27FC236}">
-                <a16:creationId xmlns:a16="http://schemas.microsoft.com/office/drawing/2014/main" id="{F8A1968E-7C0D-4EB3-1F6E-FA52661193D4}"/>
+                <a16:creationId xmlns:a16="http://schemas.microsoft.com/office/drawing/2014/main" id="{BB1D275B-6C61-54EC-6FF6-FBD740248CA9}"/>
               </a:ext>
             </a:extLst>
           </p:cNvPr>
@@ -3643,7 +3664,7 @@
         </p:nvSpPr>
         <p:spPr>
           <a:xfrm>
-            <a:off x="815825" y="304560"/>
+            <a:off x="815825" y="203046"/>
             <a:ext cx="8118625" cy="830997"/>
           </a:xfrm>
           <a:prstGeom prst="rect">
@@ -3665,7 +3686,27 @@
                 <a:latin typeface="Roboto Black" panose="02000000000000000000" pitchFamily="2" charset="0"/>
                 <a:ea typeface="Roboto Black" panose="02000000000000000000" pitchFamily="2" charset="0"/>
               </a:rPr>
-              <a:t>HashSet&lt;T&gt;</a:t>
+              <a:t>Dictionary&lt;</a:t>
+            </a:r>
+            <a:r>
+              <a:rPr lang="en-US" sz="4800" dirty="0" err="1">
+                <a:solidFill>
+                  <a:schemeClr val="accent2"/>
+                </a:solidFill>
+                <a:latin typeface="Roboto Black" panose="02000000000000000000" pitchFamily="2" charset="0"/>
+                <a:ea typeface="Roboto Black" panose="02000000000000000000" pitchFamily="2" charset="0"/>
+              </a:rPr>
+              <a:t>TKey</a:t>
+            </a:r>
+            <a:r>
+              <a:rPr lang="en-US" sz="4800" dirty="0">
+                <a:solidFill>
+                  <a:schemeClr val="accent2"/>
+                </a:solidFill>
+                <a:latin typeface="Roboto Black" panose="02000000000000000000" pitchFamily="2" charset="0"/>
+                <a:ea typeface="Roboto Black" panose="02000000000000000000" pitchFamily="2" charset="0"/>
+              </a:rPr>
+              <a:t>, TValue&gt;</a:t>
             </a:r>
           </a:p>
         </p:txBody>
@@ -3675,7 +3716,7 @@
           <p:cNvPr id="7" name="TextBox 6">
             <a:extLst>
               <a:ext uri="{FF2B5EF4-FFF2-40B4-BE49-F238E27FC236}">
-                <a16:creationId xmlns:a16="http://schemas.microsoft.com/office/drawing/2014/main" id="{FFD11FC6-175A-8FB9-A2F4-18E15394E445}"/>
+                <a16:creationId xmlns:a16="http://schemas.microsoft.com/office/drawing/2014/main" id="{4034AB77-E321-D3EB-4403-5D8C2D17E6DE}"/>
               </a:ext>
             </a:extLst>
           </p:cNvPr>
@@ -3684,8 +3725,8 @@
         </p:nvSpPr>
         <p:spPr>
           <a:xfrm>
-            <a:off x="815825" y="1135557"/>
-            <a:ext cx="9045725" cy="3046988"/>
+            <a:off x="815825" y="1021257"/>
+            <a:ext cx="9045725" cy="2308324"/>
           </a:xfrm>
           <a:prstGeom prst="rect">
             <a:avLst/>
@@ -3703,25 +3744,72 @@
                 <a:latin typeface="-apple-system"/>
                 <a:ea typeface="Roboto" panose="02000000000000000000" pitchFamily="2" charset="0"/>
               </a:rPr>
-              <a:t>A HashSet </a:t>
+              <a:t>A Dictionary is a collection that stores </a:t>
+            </a:r>
+            <a:r>
+              <a:rPr lang="en-US" sz="1600" u="sng" dirty="0">
+                <a:solidFill>
+                  <a:schemeClr val="accent5"/>
+                </a:solidFill>
+                <a:latin typeface="-apple-system"/>
+                <a:ea typeface="Roboto" panose="02000000000000000000" pitchFamily="2" charset="0"/>
+              </a:rPr>
+              <a:t>key-value pairs</a:t>
             </a:r>
             <a:r>
               <a:rPr lang="en-US" sz="1600" dirty="0">
                 <a:latin typeface="-apple-system"/>
-              </a:rPr>
-              <a:t>is a collection that stores </a:t>
-            </a:r>
-            <a:r>
-              <a:rPr lang="en-US" sz="1600" b="1" dirty="0">
-                <a:latin typeface="-apple-system"/>
-              </a:rPr>
-              <a:t>unique elements</a:t>
-            </a:r>
+                <a:ea typeface="Roboto" panose="02000000000000000000" pitchFamily="2" charset="0"/>
+              </a:rPr>
+              <a:t>, providing fast lookups, additions, and removals based on keys.</a:t>
+            </a:r>
+          </a:p>
+          <a:p>
+            <a:pPr marL="742950" lvl="1" indent="-285750">
+              <a:buFont typeface="Arial" panose="020B0604020202020204" pitchFamily="34" charset="0"/>
+              <a:buChar char="•"/>
+            </a:pPr>
             <a:r>
               <a:rPr lang="en-US" sz="1600" dirty="0">
                 <a:latin typeface="-apple-system"/>
               </a:rPr>
-              <a:t>, meaning it does not allow duplicate values. </a:t>
+              <a:t>Each key in a</a:t>
+            </a:r>
+            <a:r>
+              <a:rPr lang="en-US" sz="1600" dirty="0">
+                <a:latin typeface="-apple-system"/>
+                <a:ea typeface="Roboto" panose="02000000000000000000" pitchFamily="2" charset="0"/>
+              </a:rPr>
+              <a:t> Dictionary </a:t>
+            </a:r>
+            <a:r>
+              <a:rPr lang="en-US" sz="1600" u="sng" dirty="0">
+                <a:solidFill>
+                  <a:schemeClr val="accent5"/>
+                </a:solidFill>
+                <a:latin typeface="-apple-system"/>
+                <a:ea typeface="Roboto" panose="02000000000000000000" pitchFamily="2" charset="0"/>
+              </a:rPr>
+              <a:t>must be unique</a:t>
+            </a:r>
+            <a:r>
+              <a:rPr lang="en-US" sz="1600" dirty="0">
+                <a:latin typeface="-apple-system"/>
+                <a:ea typeface="Roboto" panose="02000000000000000000" pitchFamily="2" charset="0"/>
+              </a:rPr>
+              <a:t>.</a:t>
+            </a:r>
+          </a:p>
+          <a:p>
+            <a:pPr marL="742950" lvl="1" indent="-285750">
+              <a:buFont typeface="Arial" panose="020B0604020202020204" pitchFamily="34" charset="0"/>
+              <a:buChar char="•"/>
+            </a:pPr>
+            <a:r>
+              <a:rPr lang="en-US" sz="1600" dirty="0">
+                <a:latin typeface="-apple-system"/>
+              </a:rPr>
+              <a:t>Values are accessed efficiently using their associated keys.</a:t>
             </a:r>
             <a:endParaRPr lang="en-US" sz="1600" dirty="0">
               <a:latin typeface="-apple-system"/>
@@ -3737,122 +3825,8 @@
               <a:rPr lang="en-US" sz="1600" dirty="0">
                 <a:latin typeface="-apple-system"/>
               </a:rPr>
-              <a:t>It does not guarantee any specific order of elements.</a:t>
-            </a:r>
-          </a:p>
-          <a:p>
-            <a:pPr marL="742950" lvl="1" indent="-285750">
-              <a:buFont typeface="Arial" panose="020B0604020202020204" pitchFamily="34" charset="0"/>
-              <a:buChar char="•"/>
-            </a:pPr>
-            <a:r>
-              <a:rPr lang="en-US" sz="1600" dirty="0">
-                <a:latin typeface="-apple-system"/>
-              </a:rPr>
-              <a:t>Supports mathematical set operations such as:</a:t>
-            </a:r>
-          </a:p>
-          <a:p>
-            <a:pPr marL="1200150" lvl="2" indent="-285750">
-              <a:buFont typeface="Arial" panose="020B0604020202020204" pitchFamily="34" charset="0"/>
-              <a:buChar char="•"/>
-            </a:pPr>
-            <a:r>
-              <a:rPr lang="en-US" sz="1600" b="1" dirty="0" err="1">
-                <a:latin typeface="-apple-system"/>
-              </a:rPr>
-              <a:t>UnionWith</a:t>
-            </a:r>
-            <a:r>
-              <a:rPr lang="en-US" sz="1600" b="1" dirty="0">
-                <a:latin typeface="-apple-system"/>
-              </a:rPr>
-              <a:t>(): </a:t>
-            </a:r>
-            <a:r>
-              <a:rPr lang="en-US" sz="1600" dirty="0">
-                <a:latin typeface="-apple-system"/>
-              </a:rPr>
-              <a:t>Combines two sets, removing duplicates.</a:t>
-            </a:r>
-          </a:p>
-          <a:p>
-            <a:pPr marL="1200150" lvl="2" indent="-285750">
-              <a:buFont typeface="Arial" panose="020B0604020202020204" pitchFamily="34" charset="0"/>
-              <a:buChar char="•"/>
-            </a:pPr>
-            <a:r>
-              <a:rPr lang="en-US" sz="1600" b="1" dirty="0" err="1">
-                <a:latin typeface="-apple-system"/>
-              </a:rPr>
-              <a:t>IntersectWith</a:t>
-            </a:r>
-            <a:r>
-              <a:rPr lang="en-US" sz="1600" b="1" dirty="0">
-                <a:latin typeface="-apple-system"/>
-              </a:rPr>
-              <a:t>(): </a:t>
-            </a:r>
-            <a:r>
-              <a:rPr lang="en-US" sz="1600" dirty="0">
-                <a:latin typeface="-apple-system"/>
-              </a:rPr>
-              <a:t>Keeps only elements that exist in both sets.</a:t>
-            </a:r>
-          </a:p>
-          <a:p>
-            <a:pPr marL="1200150" lvl="2" indent="-285750">
-              <a:buFont typeface="Arial" panose="020B0604020202020204" pitchFamily="34" charset="0"/>
-              <a:buChar char="•"/>
-            </a:pPr>
-            <a:r>
-              <a:rPr lang="en-US" sz="1600" b="1" dirty="0" err="1">
-                <a:latin typeface="-apple-system"/>
-              </a:rPr>
-              <a:t>ExceptWith</a:t>
-            </a:r>
-            <a:r>
-              <a:rPr lang="en-US" sz="1600" b="1" dirty="0">
-                <a:latin typeface="-apple-system"/>
-              </a:rPr>
-              <a:t>(): </a:t>
-            </a:r>
-            <a:r>
-              <a:rPr lang="en-US" sz="1600" dirty="0">
-                <a:latin typeface="-apple-system"/>
-              </a:rPr>
-              <a:t>Removes elements present in another set.</a:t>
-            </a:r>
-          </a:p>
-          <a:p>
-            <a:pPr marL="1200150" lvl="2" indent="-285750">
-              <a:buFont typeface="Arial" panose="020B0604020202020204" pitchFamily="34" charset="0"/>
-              <a:buChar char="•"/>
-            </a:pPr>
-            <a:r>
-              <a:rPr lang="en-US" sz="1600" b="1" dirty="0" err="1">
-                <a:latin typeface="-apple-system"/>
-              </a:rPr>
-              <a:t>SymmetricExceptWith</a:t>
-            </a:r>
-            <a:r>
-              <a:rPr lang="en-US" sz="1600" b="1" dirty="0">
-                <a:latin typeface="-apple-system"/>
-              </a:rPr>
-              <a:t>():</a:t>
-            </a:r>
-            <a:r>
-              <a:rPr lang="en-US" sz="1600" dirty="0">
-                <a:latin typeface="-apple-system"/>
-              </a:rPr>
-              <a:t> Keeps elements that are unique between two sets.</a:t>
-            </a:r>
-          </a:p>
-          <a:p>
-            <a:pPr marL="1200150" lvl="2" indent="-285750">
-              <a:buFont typeface="Arial" panose="020B0604020202020204" pitchFamily="34" charset="0"/>
-              <a:buChar char="•"/>
-            </a:pPr>
+              <a:t>The dictionary resizes itself as elements are added.</a:t>
+            </a:r>
             <a:endParaRPr lang="en-US" sz="1600" dirty="0">
               <a:latin typeface="-apple-system"/>
               <a:ea typeface="Roboto" panose="02000000000000000000" pitchFamily="2" charset="0"/>
@@ -3908,7 +3882,7 @@
           <p:cNvPr id="2" name="Table 1">
             <a:extLst>
               <a:ext uri="{FF2B5EF4-FFF2-40B4-BE49-F238E27FC236}">
-                <a16:creationId xmlns:a16="http://schemas.microsoft.com/office/drawing/2014/main" id="{049A01E9-646E-C766-9D0E-9F8D4222ED6B}"/>
+                <a16:creationId xmlns:a16="http://schemas.microsoft.com/office/drawing/2014/main" id="{8B64CB2C-D42B-61E4-3DC9-94ACBA588F8E}"/>
               </a:ext>
             </a:extLst>
           </p:cNvPr>
@@ -3918,14 +3892,14 @@
           <p:nvPr>
             <p:extLst>
               <p:ext uri="{D42A27DB-BD31-4B8C-83A1-F6EECF244321}">
-                <p14:modId xmlns:p14="http://schemas.microsoft.com/office/powerpoint/2010/main" val="3641433175"/>
+                <p14:modId xmlns:p14="http://schemas.microsoft.com/office/powerpoint/2010/main" val="2808950184"/>
               </p:ext>
             </p:extLst>
           </p:nvPr>
         </p:nvGraphicFramePr>
         <p:xfrm>
-          <a:off x="908050" y="3429000"/>
-          <a:ext cx="10604500" cy="3130600"/>
+          <a:off x="908050" y="2602846"/>
+          <a:ext cx="10604500" cy="4066578"/>
         </p:xfrm>
         <a:graphic>
           <a:graphicData uri="http://schemas.openxmlformats.org/drawingml/2006/table">
@@ -4015,7 +3989,7 @@
                           <a:latin typeface="Roboto" panose="02000000000000000000" pitchFamily="2" charset="0"/>
                           <a:ea typeface="Roboto" panose="02000000000000000000" pitchFamily="2" charset="0"/>
                         </a:rPr>
-                        <a:t>Returns the number of elements in the HashSet.</a:t>
+                        <a:t>Returns the number of key-value pairs in the dictionary.</a:t>
                       </a:r>
                     </a:p>
                   </a:txBody>
@@ -4027,6 +4001,84 @@
                   </a:ext>
                 </a:extLst>
               </a:tr>
+              <a:tr h="454243">
+                <a:tc>
+                  <a:txBody>
+                    <a:bodyPr/>
+                    <a:lstStyle/>
+                    <a:p>
+                      <a:r>
+                        <a:rPr lang="en-US" sz="1400" b="1" dirty="0">
+                          <a:latin typeface="Roboto" panose="02000000000000000000" pitchFamily="2" charset="0"/>
+                          <a:ea typeface="Roboto" panose="02000000000000000000" pitchFamily="2" charset="0"/>
+                        </a:rPr>
+                        <a:t>Keys</a:t>
+                      </a:r>
+                    </a:p>
+                  </a:txBody>
+                  <a:tcPr/>
+                </a:tc>
+                <a:tc>
+                  <a:txBody>
+                    <a:bodyPr/>
+                    <a:lstStyle/>
+                    <a:p>
+                      <a:r>
+                        <a:rPr lang="en-US" sz="1400" dirty="0">
+                          <a:latin typeface="Roboto" panose="02000000000000000000" pitchFamily="2" charset="0"/>
+                          <a:ea typeface="Roboto" panose="02000000000000000000" pitchFamily="2" charset="0"/>
+                        </a:rPr>
+                        <a:t>Returns a collection containing all the keys in the dictionary.</a:t>
+                      </a:r>
+                    </a:p>
+                  </a:txBody>
+                  <a:tcPr/>
+                </a:tc>
+                <a:extLst>
+                  <a:ext uri="{0D108BD9-81ED-4DB2-BD59-A6C34878D82A}">
+                    <a16:rowId xmlns:a16="http://schemas.microsoft.com/office/drawing/2014/main" val="1108414833"/>
+                  </a:ext>
+                </a:extLst>
+              </a:tr>
+              <a:tr h="454243">
+                <a:tc>
+                  <a:txBody>
+                    <a:bodyPr/>
+                    <a:lstStyle/>
+                    <a:p>
+                      <a:r>
+                        <a:rPr lang="en-US" sz="1400" b="1" dirty="0">
+                          <a:latin typeface="Roboto" panose="02000000000000000000" pitchFamily="2" charset="0"/>
+                          <a:ea typeface="Roboto" panose="02000000000000000000" pitchFamily="2" charset="0"/>
+                        </a:rPr>
+                        <a:t>Values</a:t>
+                      </a:r>
+                    </a:p>
+                  </a:txBody>
+                  <a:tcPr/>
+                </a:tc>
+                <a:tc>
+                  <a:txBody>
+                    <a:bodyPr/>
+                    <a:lstStyle/>
+                    <a:p>
+                      <a:r>
+                        <a:rPr lang="en-US" sz="1400" dirty="0">
+                          <a:latin typeface="Roboto" panose="02000000000000000000" pitchFamily="2" charset="0"/>
+                          <a:ea typeface="Roboto" panose="02000000000000000000" pitchFamily="2" charset="0"/>
+                        </a:rPr>
+                        <a:t>Returns a collection containing all the values in the dictionary.</a:t>
+                      </a:r>
+                    </a:p>
+                  </a:txBody>
+                  <a:tcPr/>
+                </a:tc>
+                <a:extLst>
+                  <a:ext uri="{0D108BD9-81ED-4DB2-BD59-A6C34878D82A}">
+                    <a16:rowId xmlns:a16="http://schemas.microsoft.com/office/drawing/2014/main" val="3710949462"/>
+                  </a:ext>
+                </a:extLst>
+              </a:tr>
               <a:tr h="504414">
                 <a:tc>
                   <a:txBody>
@@ -4038,7 +4090,21 @@
                           <a:latin typeface="Roboto" panose="02000000000000000000" pitchFamily="2" charset="0"/>
                           <a:ea typeface="Roboto" panose="02000000000000000000" pitchFamily="2" charset="0"/>
                         </a:rPr>
-                        <a:t>Add()</a:t>
+                        <a:t>Add(</a:t>
+                      </a:r>
+                      <a:r>
+                        <a:rPr lang="en-US" sz="1400" b="1" dirty="0" err="1">
+                          <a:latin typeface="Roboto" panose="02000000000000000000" pitchFamily="2" charset="0"/>
+                          <a:ea typeface="Roboto" panose="02000000000000000000" pitchFamily="2" charset="0"/>
+                        </a:rPr>
+                        <a:t>TKey</a:t>
+                      </a:r>
+                      <a:r>
+                        <a:rPr lang="en-US" sz="1400" b="1" dirty="0">
+                          <a:latin typeface="Roboto" panose="02000000000000000000" pitchFamily="2" charset="0"/>
+                          <a:ea typeface="Roboto" panose="02000000000000000000" pitchFamily="2" charset="0"/>
+                        </a:rPr>
+                        <a:t> key, TValue value)</a:t>
                       </a:r>
                     </a:p>
                   </a:txBody>
@@ -4054,7 +4120,7 @@
                           <a:latin typeface="Roboto" panose="02000000000000000000" pitchFamily="2" charset="0"/>
                           <a:ea typeface="Roboto" panose="02000000000000000000" pitchFamily="2" charset="0"/>
                         </a:rPr>
-                        <a:t>Adds an element to the HashSet.</a:t>
+                        <a:t>Adds a key-value pair to the dictionary; throws an exception if the key already exists.</a:t>
                       </a:r>
                     </a:p>
                   </a:txBody>
@@ -4093,7 +4159,7 @@
                           <a:latin typeface="Roboto" panose="02000000000000000000" pitchFamily="2" charset="0"/>
                           <a:ea typeface="Roboto" panose="02000000000000000000" pitchFamily="2" charset="0"/>
                         </a:rPr>
-                        <a:t>Removes all elements from the HashSet.</a:t>
+                        <a:t>Removes all key-value pairs from the dictionary.</a:t>
                       </a:r>
                     </a:p>
                   </a:txBody>
@@ -4112,11 +4178,32 @@
                     <a:lstStyle/>
                     <a:p>
                       <a:r>
+                        <a:rPr lang="en-US" sz="1400" b="1" dirty="0" err="1">
+                          <a:latin typeface="Roboto" panose="02000000000000000000" pitchFamily="2" charset="0"/>
+                          <a:ea typeface="Roboto" panose="02000000000000000000" pitchFamily="2" charset="0"/>
+                        </a:rPr>
+                        <a:t>ContainsKey</a:t>
+                      </a:r>
+                      <a:r>
                         <a:rPr lang="en-US" sz="1400" b="1" dirty="0">
                           <a:latin typeface="Roboto" panose="02000000000000000000" pitchFamily="2" charset="0"/>
                           <a:ea typeface="Roboto" panose="02000000000000000000" pitchFamily="2" charset="0"/>
                         </a:rPr>
-                        <a:t>Contains()</a:t>
+                        <a:t>(</a:t>
+                      </a:r>
+                      <a:r>
+                        <a:rPr lang="en-US" sz="1400" b="1" dirty="0" err="1">
+                          <a:latin typeface="Roboto" panose="02000000000000000000" pitchFamily="2" charset="0"/>
+                          <a:ea typeface="Roboto" panose="02000000000000000000" pitchFamily="2" charset="0"/>
+                        </a:rPr>
+                        <a:t>TKey</a:t>
+                      </a:r>
+                      <a:r>
+                        <a:rPr lang="en-US" sz="1400" b="1" dirty="0">
+                          <a:latin typeface="Roboto" panose="02000000000000000000" pitchFamily="2" charset="0"/>
+                          <a:ea typeface="Roboto" panose="02000000000000000000" pitchFamily="2" charset="0"/>
+                        </a:rPr>
+                        <a:t> key)</a:t>
                       </a:r>
                     </a:p>
                   </a:txBody>
@@ -4132,7 +4219,7 @@
                           <a:latin typeface="Roboto" panose="02000000000000000000" pitchFamily="2" charset="0"/>
                           <a:ea typeface="Roboto" panose="02000000000000000000" pitchFamily="2" charset="0"/>
                         </a:rPr>
-                        <a:t>Checks if a specific element exists in the HashSet.</a:t>
+                        <a:t>Checks if the specified key exists in the dictionary.</a:t>
                       </a:r>
                     </a:p>
                   </a:txBody>
@@ -4172,14 +4259,14 @@
                           <a:latin typeface="Roboto" panose="02000000000000000000" pitchFamily="2" charset="0"/>
                           <a:ea typeface="Roboto" panose="02000000000000000000" pitchFamily="2" charset="0"/>
                         </a:rPr>
-                        <a:t>CopyTo</a:t>
+                        <a:t>ContainsValue</a:t>
                       </a:r>
                       <a:r>
                         <a:rPr lang="en-US" sz="1400" b="1" dirty="0">
                           <a:latin typeface="Roboto" panose="02000000000000000000" pitchFamily="2" charset="0"/>
                           <a:ea typeface="Roboto" panose="02000000000000000000" pitchFamily="2" charset="0"/>
                         </a:rPr>
-                        <a:t>(array)</a:t>
+                        <a:t>(TValue value)</a:t>
                       </a:r>
                     </a:p>
                   </a:txBody>
@@ -4212,7 +4299,7 @@
                           <a:latin typeface="Roboto" panose="02000000000000000000" pitchFamily="2" charset="0"/>
                           <a:ea typeface="Roboto" panose="02000000000000000000" pitchFamily="2" charset="0"/>
                         </a:rPr>
-                        <a:t>Copies all elements of the HashSet into a specified array.</a:t>
+                        <a:t>Checks if the specified value exists in the dictionary.</a:t>
                       </a:r>
                     </a:p>
                   </a:txBody>
@@ -4252,7 +4339,21 @@
                           <a:latin typeface="Roboto" panose="02000000000000000000" pitchFamily="2" charset="0"/>
                           <a:ea typeface="Roboto" panose="02000000000000000000" pitchFamily="2" charset="0"/>
                         </a:rPr>
-                        <a:t>Remove()</a:t>
+                        <a:t>Remove(</a:t>
+                      </a:r>
+                      <a:r>
+                        <a:rPr lang="en-US" sz="1400" b="1" dirty="0" err="1">
+                          <a:latin typeface="Roboto" panose="02000000000000000000" pitchFamily="2" charset="0"/>
+                          <a:ea typeface="Roboto" panose="02000000000000000000" pitchFamily="2" charset="0"/>
+                        </a:rPr>
+                        <a:t>TKey</a:t>
+                      </a:r>
+                      <a:r>
+                        <a:rPr lang="en-US" sz="1400" b="1" dirty="0">
+                          <a:latin typeface="Roboto" panose="02000000000000000000" pitchFamily="2" charset="0"/>
+                          <a:ea typeface="Roboto" panose="02000000000000000000" pitchFamily="2" charset="0"/>
+                        </a:rPr>
+                        <a:t> key)</a:t>
                       </a:r>
                     </a:p>
                   </a:txBody>
@@ -4285,7 +4386,7 @@
                           <a:latin typeface="Roboto" panose="02000000000000000000" pitchFamily="2" charset="0"/>
                           <a:ea typeface="Roboto" panose="02000000000000000000" pitchFamily="2" charset="0"/>
                         </a:rPr>
-                        <a:t>Removes a specific element from the HashSet.</a:t>
+                        <a:t>Removes the key-value pair associated with the given key; returns true if successful, and false if the key is not found.</a:t>
                       </a:r>
                     </a:p>
                   </a:txBody>
@@ -4303,10 +4404,10 @@
       </p:graphicFrame>
       <p:pic>
         <p:nvPicPr>
-          <p:cNvPr id="5" name="Picture 4" descr="A group of colorful shapes&#10;&#10;Description automatically generated">
+          <p:cNvPr id="4" name="Picture 3" descr="A screenshot of a computer&#10;&#10;Description automatically generated">
             <a:extLst>
               <a:ext uri="{FF2B5EF4-FFF2-40B4-BE49-F238E27FC236}">
-                <a16:creationId xmlns:a16="http://schemas.microsoft.com/office/drawing/2014/main" id="{C076C9B1-99D6-48CA-F730-F4C22187B51D}"/>
+                <a16:creationId xmlns:a16="http://schemas.microsoft.com/office/drawing/2014/main" id="{D022C5BC-FE6A-DC20-2B6A-041F635E98C4}"/>
               </a:ext>
             </a:extLst>
           </p:cNvPr>
@@ -4323,14 +4424,13 @@
               </a:ext>
             </a:extLst>
           </a:blip>
-          <a:stretch>
-            <a:fillRect/>
-          </a:stretch>
+          <a:srcRect t="10539" b="27150"/>
+          <a:stretch/>
         </p:blipFill>
         <p:spPr>
           <a:xfrm>
-            <a:off x="9271000" y="971226"/>
-            <a:ext cx="2292350" cy="2042275"/>
+            <a:off x="9358462" y="224155"/>
+            <a:ext cx="2746289" cy="2308325"/>
           </a:xfrm>
           <a:prstGeom prst="rect">
             <a:avLst/>
@@ -4340,7 +4440,7 @@
     </p:spTree>
     <p:extLst>
       <p:ext uri="{BB962C8B-B14F-4D97-AF65-F5344CB8AC3E}">
-        <p14:creationId xmlns:p14="http://schemas.microsoft.com/office/powerpoint/2010/main" val="4277104657"/>
+        <p14:creationId xmlns:p14="http://schemas.microsoft.com/office/powerpoint/2010/main" val="3275052669"/>
       </p:ext>
     </p:extLst>
   </p:cSld>
@@ -12106,7 +12206,7 @@
         <p:cNvPr id="1" name="">
           <a:extLst>
             <a:ext uri="{FF2B5EF4-FFF2-40B4-BE49-F238E27FC236}">
-              <a16:creationId xmlns:a16="http://schemas.microsoft.com/office/drawing/2014/main" id="{62FFFE98-06B2-F3C3-670D-117743446329}"/>
+              <a16:creationId xmlns:a16="http://schemas.microsoft.com/office/drawing/2014/main" id="{07FD455E-26B8-0442-EF75-70EF7D7D5312}"/>
             </a:ext>
           </a:extLst>
         </p:cNvPr>
@@ -12126,7 +12226,7 @@
           <p:cNvPr id="10" name="Rectangle 9">
             <a:extLst>
               <a:ext uri="{FF2B5EF4-FFF2-40B4-BE49-F238E27FC236}">
-                <a16:creationId xmlns:a16="http://schemas.microsoft.com/office/drawing/2014/main" id="{D951E9DC-B1AA-061D-0E8C-924133ED5A39}"/>
+                <a16:creationId xmlns:a16="http://schemas.microsoft.com/office/drawing/2014/main" id="{70A03FC1-7551-C682-4978-6FFBEE11C3DE}"/>
               </a:ext>
               <a:ext uri="{C183D7F6-B498-43B3-948B-1728B52AA6E4}">
                 <adec:decorative xmlns:adec="http://schemas.microsoft.com/office/drawing/2017/decorative" val="1"/>
@@ -12186,7 +12286,7 @@
           <p:cNvPr id="6" name="TextBox 5">
             <a:extLst>
               <a:ext uri="{FF2B5EF4-FFF2-40B4-BE49-F238E27FC236}">
-                <a16:creationId xmlns:a16="http://schemas.microsoft.com/office/drawing/2014/main" id="{BB1D275B-6C61-54EC-6FF6-FBD740248CA9}"/>
+                <a16:creationId xmlns:a16="http://schemas.microsoft.com/office/drawing/2014/main" id="{F8A1968E-7C0D-4EB3-1F6E-FA52661193D4}"/>
               </a:ext>
             </a:extLst>
           </p:cNvPr>
@@ -12195,7 +12295,7 @@
         </p:nvSpPr>
         <p:spPr>
           <a:xfrm>
-            <a:off x="815825" y="203046"/>
+            <a:off x="815825" y="304560"/>
             <a:ext cx="8118625" cy="830997"/>
           </a:xfrm>
           <a:prstGeom prst="rect">
@@ -12217,27 +12317,7 @@
                 <a:latin typeface="Roboto Black" panose="02000000000000000000" pitchFamily="2" charset="0"/>
                 <a:ea typeface="Roboto Black" panose="02000000000000000000" pitchFamily="2" charset="0"/>
               </a:rPr>
-              <a:t>Dictionary&lt;</a:t>
-            </a:r>
-            <a:r>
-              <a:rPr lang="en-US" sz="4800" dirty="0" err="1">
-                <a:solidFill>
-                  <a:schemeClr val="accent2"/>
-                </a:solidFill>
-                <a:latin typeface="Roboto Black" panose="02000000000000000000" pitchFamily="2" charset="0"/>
-                <a:ea typeface="Roboto Black" panose="02000000000000000000" pitchFamily="2" charset="0"/>
-              </a:rPr>
-              <a:t>TKey</a:t>
-            </a:r>
-            <a:r>
-              <a:rPr lang="en-US" sz="4800" dirty="0">
-                <a:solidFill>
-                  <a:schemeClr val="accent2"/>
-                </a:solidFill>
-                <a:latin typeface="Roboto Black" panose="02000000000000000000" pitchFamily="2" charset="0"/>
-                <a:ea typeface="Roboto Black" panose="02000000000000000000" pitchFamily="2" charset="0"/>
-              </a:rPr>
-              <a:t>, TValue&gt;</a:t>
+              <a:t>HashSet&lt;T&gt;</a:t>
             </a:r>
           </a:p>
         </p:txBody>
@@ -12247,7 +12327,7 @@
           <p:cNvPr id="7" name="TextBox 6">
             <a:extLst>
               <a:ext uri="{FF2B5EF4-FFF2-40B4-BE49-F238E27FC236}">
-                <a16:creationId xmlns:a16="http://schemas.microsoft.com/office/drawing/2014/main" id="{4034AB77-E321-D3EB-4403-5D8C2D17E6DE}"/>
+                <a16:creationId xmlns:a16="http://schemas.microsoft.com/office/drawing/2014/main" id="{FFD11FC6-175A-8FB9-A2F4-18E15394E445}"/>
               </a:ext>
             </a:extLst>
           </p:cNvPr>
@@ -12256,8 +12336,8 @@
         </p:nvSpPr>
         <p:spPr>
           <a:xfrm>
-            <a:off x="815825" y="1021257"/>
-            <a:ext cx="9045725" cy="2308324"/>
+            <a:off x="815825" y="1135557"/>
+            <a:ext cx="9045725" cy="3046988"/>
           </a:xfrm>
           <a:prstGeom prst="rect">
             <a:avLst/>
@@ -12275,25 +12355,30 @@
                 <a:latin typeface="-apple-system"/>
                 <a:ea typeface="Roboto" panose="02000000000000000000" pitchFamily="2" charset="0"/>
               </a:rPr>
-              <a:t>A Dictionary is a collection that stores </a:t>
-            </a:r>
-            <a:r>
-              <a:rPr lang="en-US" sz="1600" u="sng" dirty="0">
-                <a:solidFill>
-                  <a:schemeClr val="accent5"/>
-                </a:solidFill>
-                <a:latin typeface="-apple-system"/>
-                <a:ea typeface="Roboto" panose="02000000000000000000" pitchFamily="2" charset="0"/>
-              </a:rPr>
-              <a:t>key-value pairs</a:t>
+              <a:t>A HashSet </a:t>
             </a:r>
             <a:r>
               <a:rPr lang="en-US" sz="1600" dirty="0">
                 <a:latin typeface="-apple-system"/>
-                <a:ea typeface="Roboto" panose="02000000000000000000" pitchFamily="2" charset="0"/>
-              </a:rPr>
-              <a:t>, providing fast lookups, additions, and removals based on keys.</a:t>
-            </a:r>
+              </a:rPr>
+              <a:t>is a collection that stores </a:t>
+            </a:r>
+            <a:r>
+              <a:rPr lang="en-US" sz="1600" b="1" dirty="0">
+                <a:latin typeface="-apple-system"/>
+              </a:rPr>
+              <a:t>unique elements</a:t>
+            </a:r>
+            <a:r>
+              <a:rPr lang="en-US" sz="1600" dirty="0">
+                <a:latin typeface="-apple-system"/>
+              </a:rPr>
+              <a:t>, meaning it does not allow duplicate values. </a:t>
+            </a:r>
+            <a:endParaRPr lang="en-US" sz="1600" dirty="0">
+              <a:latin typeface="-apple-system"/>
+              <a:ea typeface="Roboto" panose="02000000000000000000" pitchFamily="2" charset="0"/>
+            </a:endParaRPr>
           </a:p>
           <a:p>
             <a:pPr marL="742950" lvl="1" indent="-285750">
@@ -12304,31 +12389,7 @@
               <a:rPr lang="en-US" sz="1600" dirty="0">
                 <a:latin typeface="-apple-system"/>
               </a:rPr>
-              <a:t>Each key in a</a:t>
-            </a:r>
-            <a:r>
-              <a:rPr lang="en-US" sz="1600" dirty="0">
-                <a:latin typeface="-apple-system"/>
-                <a:ea typeface="Roboto" panose="02000000000000000000" pitchFamily="2" charset="0"/>
-              </a:rPr>
-              <a:t> Dictionary </a:t>
-            </a:r>
-            <a:r>
-              <a:rPr lang="en-US" sz="1600" u="sng" dirty="0">
-                <a:solidFill>
-                  <a:schemeClr val="accent5"/>
-                </a:solidFill>
-                <a:latin typeface="-apple-system"/>
-                <a:ea typeface="Roboto" panose="02000000000000000000" pitchFamily="2" charset="0"/>
-              </a:rPr>
-              <a:t>must be unique</a:t>
-            </a:r>
-            <a:r>
-              <a:rPr lang="en-US" sz="1600" dirty="0">
-                <a:latin typeface="-apple-system"/>
-                <a:ea typeface="Roboto" panose="02000000000000000000" pitchFamily="2" charset="0"/>
-              </a:rPr>
-              <a:t>.</a:t>
+              <a:t>It does not guarantee any specific order of elements.</a:t>
             </a:r>
           </a:p>
           <a:p>
@@ -12340,24 +12401,110 @@
               <a:rPr lang="en-US" sz="1600" dirty="0">
                 <a:latin typeface="-apple-system"/>
               </a:rPr>
-              <a:t>Values are accessed efficiently using their associated keys.</a:t>
-            </a:r>
-            <a:endParaRPr lang="en-US" sz="1600" dirty="0">
-              <a:latin typeface="-apple-system"/>
-              <a:ea typeface="Roboto" panose="02000000000000000000" pitchFamily="2" charset="0"/>
-            </a:endParaRPr>
-          </a:p>
-          <a:p>
-            <a:pPr marL="742950" lvl="1" indent="-285750">
+              <a:t>Supports mathematical set operations such as:</a:t>
+            </a:r>
+          </a:p>
+          <a:p>
+            <a:pPr marL="1200150" lvl="2" indent="-285750">
               <a:buFont typeface="Arial" panose="020B0604020202020204" pitchFamily="34" charset="0"/>
               <a:buChar char="•"/>
             </a:pPr>
             <a:r>
+              <a:rPr lang="en-US" sz="1600" b="1" dirty="0" err="1">
+                <a:latin typeface="-apple-system"/>
+              </a:rPr>
+              <a:t>UnionWith</a:t>
+            </a:r>
+            <a:r>
+              <a:rPr lang="en-US" sz="1600" b="1" dirty="0">
+                <a:latin typeface="-apple-system"/>
+              </a:rPr>
+              <a:t>(): </a:t>
+            </a:r>
+            <a:r>
               <a:rPr lang="en-US" sz="1600" dirty="0">
                 <a:latin typeface="-apple-system"/>
               </a:rPr>
-              <a:t>The dictionary resizes itself as elements are added.</a:t>
-            </a:r>
+              <a:t>Combines two sets, removing duplicates.</a:t>
+            </a:r>
+          </a:p>
+          <a:p>
+            <a:pPr marL="1200150" lvl="2" indent="-285750">
+              <a:buFont typeface="Arial" panose="020B0604020202020204" pitchFamily="34" charset="0"/>
+              <a:buChar char="•"/>
+            </a:pPr>
+            <a:r>
+              <a:rPr lang="en-US" sz="1600" b="1" dirty="0" err="1">
+                <a:latin typeface="-apple-system"/>
+              </a:rPr>
+              <a:t>IntersectWith</a:t>
+            </a:r>
+            <a:r>
+              <a:rPr lang="en-US" sz="1600" b="1" dirty="0">
+                <a:latin typeface="-apple-system"/>
+              </a:rPr>
+              <a:t>(): </a:t>
+            </a:r>
+            <a:r>
+              <a:rPr lang="en-US" sz="1600" dirty="0">
+                <a:latin typeface="-apple-system"/>
+              </a:rPr>
+              <a:t>Keeps only elements that exist in both sets.</a:t>
+            </a:r>
+          </a:p>
+          <a:p>
+            <a:pPr marL="1200150" lvl="2" indent="-285750">
+              <a:buFont typeface="Arial" panose="020B0604020202020204" pitchFamily="34" charset="0"/>
+              <a:buChar char="•"/>
+            </a:pPr>
+            <a:r>
+              <a:rPr lang="en-US" sz="1600" b="1" dirty="0" err="1">
+                <a:latin typeface="-apple-system"/>
+              </a:rPr>
+              <a:t>ExceptWith</a:t>
+            </a:r>
+            <a:r>
+              <a:rPr lang="en-US" sz="1600" b="1" dirty="0">
+                <a:latin typeface="-apple-system"/>
+              </a:rPr>
+              <a:t>(): </a:t>
+            </a:r>
+            <a:r>
+              <a:rPr lang="en-US" sz="1600" dirty="0">
+                <a:latin typeface="-apple-system"/>
+              </a:rPr>
+              <a:t>Removes elements present in another set.</a:t>
+            </a:r>
+          </a:p>
+          <a:p>
+            <a:pPr marL="1200150" lvl="2" indent="-285750">
+              <a:buFont typeface="Arial" panose="020B0604020202020204" pitchFamily="34" charset="0"/>
+              <a:buChar char="•"/>
+            </a:pPr>
+            <a:r>
+              <a:rPr lang="en-US" sz="1600" b="1" dirty="0" err="1">
+                <a:latin typeface="-apple-system"/>
+              </a:rPr>
+              <a:t>SymmetricExceptWith</a:t>
+            </a:r>
+            <a:r>
+              <a:rPr lang="en-US" sz="1600" b="1" dirty="0">
+                <a:latin typeface="-apple-system"/>
+              </a:rPr>
+              <a:t>():</a:t>
+            </a:r>
+            <a:r>
+              <a:rPr lang="en-US" sz="1600" dirty="0">
+                <a:latin typeface="-apple-system"/>
+              </a:rPr>
+              <a:t> Keeps elements that are unique between two sets.</a:t>
+            </a:r>
+          </a:p>
+          <a:p>
+            <a:pPr marL="1200150" lvl="2" indent="-285750">
+              <a:buFont typeface="Arial" panose="020B0604020202020204" pitchFamily="34" charset="0"/>
+              <a:buChar char="•"/>
+            </a:pPr>
             <a:endParaRPr lang="en-US" sz="1600" dirty="0">
               <a:latin typeface="-apple-system"/>
               <a:ea typeface="Roboto" panose="02000000000000000000" pitchFamily="2" charset="0"/>
@@ -12413,7 +12560,7 @@
           <p:cNvPr id="2" name="Table 1">
             <a:extLst>
               <a:ext uri="{FF2B5EF4-FFF2-40B4-BE49-F238E27FC236}">
-                <a16:creationId xmlns:a16="http://schemas.microsoft.com/office/drawing/2014/main" id="{8B64CB2C-D42B-61E4-3DC9-94ACBA588F8E}"/>
+                <a16:creationId xmlns:a16="http://schemas.microsoft.com/office/drawing/2014/main" id="{049A01E9-646E-C766-9D0E-9F8D4222ED6B}"/>
               </a:ext>
             </a:extLst>
           </p:cNvPr>
@@ -12423,14 +12570,14 @@
           <p:nvPr>
             <p:extLst>
               <p:ext uri="{D42A27DB-BD31-4B8C-83A1-F6EECF244321}">
-                <p14:modId xmlns:p14="http://schemas.microsoft.com/office/powerpoint/2010/main" val="2808950184"/>
+                <p14:modId xmlns:p14="http://schemas.microsoft.com/office/powerpoint/2010/main" val="3641433175"/>
               </p:ext>
             </p:extLst>
           </p:nvPr>
         </p:nvGraphicFramePr>
         <p:xfrm>
-          <a:off x="908050" y="2602846"/>
-          <a:ext cx="10604500" cy="4066578"/>
+          <a:off x="908050" y="3429000"/>
+          <a:ext cx="10604500" cy="3130600"/>
         </p:xfrm>
         <a:graphic>
           <a:graphicData uri="http://schemas.openxmlformats.org/drawingml/2006/table">
@@ -12520,7 +12667,7 @@
                           <a:latin typeface="Roboto" panose="02000000000000000000" pitchFamily="2" charset="0"/>
                           <a:ea typeface="Roboto" panose="02000000000000000000" pitchFamily="2" charset="0"/>
                         </a:rPr>
-                        <a:t>Returns the number of key-value pairs in the dictionary.</a:t>
+                        <a:t>Returns the number of elements in the HashSet.</a:t>
                       </a:r>
                     </a:p>
                   </a:txBody>
@@ -12532,7 +12679,7 @@
                   </a:ext>
                 </a:extLst>
               </a:tr>
-              <a:tr h="454243">
+              <a:tr h="504414">
                 <a:tc>
                   <a:txBody>
                     <a:bodyPr/>
@@ -12543,7 +12690,7 @@
                           <a:latin typeface="Roboto" panose="02000000000000000000" pitchFamily="2" charset="0"/>
                           <a:ea typeface="Roboto" panose="02000000000000000000" pitchFamily="2" charset="0"/>
                         </a:rPr>
-                        <a:t>Keys</a:t>
+                        <a:t>Add()</a:t>
                       </a:r>
                     </a:p>
                   </a:txBody>
@@ -12559,99 +12706,7 @@
                           <a:latin typeface="Roboto" panose="02000000000000000000" pitchFamily="2" charset="0"/>
                           <a:ea typeface="Roboto" panose="02000000000000000000" pitchFamily="2" charset="0"/>
                         </a:rPr>
-                        <a:t>Returns a collection containing all the keys in the dictionary.</a:t>
-                      </a:r>
-                    </a:p>
-                  </a:txBody>
-                  <a:tcPr/>
-                </a:tc>
-                <a:extLst>
-                  <a:ext uri="{0D108BD9-81ED-4DB2-BD59-A6C34878D82A}">
-                    <a16:rowId xmlns:a16="http://schemas.microsoft.com/office/drawing/2014/main" val="1108414833"/>
-                  </a:ext>
-                </a:extLst>
-              </a:tr>
-              <a:tr h="454243">
-                <a:tc>
-                  <a:txBody>
-                    <a:bodyPr/>
-                    <a:lstStyle/>
-                    <a:p>
-                      <a:r>
-                        <a:rPr lang="en-US" sz="1400" b="1" dirty="0">
-                          <a:latin typeface="Roboto" panose="02000000000000000000" pitchFamily="2" charset="0"/>
-                          <a:ea typeface="Roboto" panose="02000000000000000000" pitchFamily="2" charset="0"/>
-                        </a:rPr>
-                        <a:t>Values</a:t>
-                      </a:r>
-                    </a:p>
-                  </a:txBody>
-                  <a:tcPr/>
-                </a:tc>
-                <a:tc>
-                  <a:txBody>
-                    <a:bodyPr/>
-                    <a:lstStyle/>
-                    <a:p>
-                      <a:r>
-                        <a:rPr lang="en-US" sz="1400" dirty="0">
-                          <a:latin typeface="Roboto" panose="02000000000000000000" pitchFamily="2" charset="0"/>
-                          <a:ea typeface="Roboto" panose="02000000000000000000" pitchFamily="2" charset="0"/>
-                        </a:rPr>
-                        <a:t>Returns a collection containing all the values in the dictionary.</a:t>
-                      </a:r>
-                    </a:p>
-                  </a:txBody>
-                  <a:tcPr/>
-                </a:tc>
-                <a:extLst>
-                  <a:ext uri="{0D108BD9-81ED-4DB2-BD59-A6C34878D82A}">
-                    <a16:rowId xmlns:a16="http://schemas.microsoft.com/office/drawing/2014/main" val="3710949462"/>
-                  </a:ext>
-                </a:extLst>
-              </a:tr>
-              <a:tr h="504414">
-                <a:tc>
-                  <a:txBody>
-                    <a:bodyPr/>
-                    <a:lstStyle/>
-                    <a:p>
-                      <a:r>
-                        <a:rPr lang="en-US" sz="1400" b="1" dirty="0">
-                          <a:latin typeface="Roboto" panose="02000000000000000000" pitchFamily="2" charset="0"/>
-                          <a:ea typeface="Roboto" panose="02000000000000000000" pitchFamily="2" charset="0"/>
-                        </a:rPr>
-                        <a:t>Add(</a:t>
-                      </a:r>
-                      <a:r>
-                        <a:rPr lang="en-US" sz="1400" b="1" dirty="0" err="1">
-                          <a:latin typeface="Roboto" panose="02000000000000000000" pitchFamily="2" charset="0"/>
-                          <a:ea typeface="Roboto" panose="02000000000000000000" pitchFamily="2" charset="0"/>
-                        </a:rPr>
-                        <a:t>TKey</a:t>
-                      </a:r>
-                      <a:r>
-                        <a:rPr lang="en-US" sz="1400" b="1" dirty="0">
-                          <a:latin typeface="Roboto" panose="02000000000000000000" pitchFamily="2" charset="0"/>
-                          <a:ea typeface="Roboto" panose="02000000000000000000" pitchFamily="2" charset="0"/>
-                        </a:rPr>
-                        <a:t> key, TValue value)</a:t>
-                      </a:r>
-                    </a:p>
-                  </a:txBody>
-                  <a:tcPr/>
-                </a:tc>
-                <a:tc>
-                  <a:txBody>
-                    <a:bodyPr/>
-                    <a:lstStyle/>
-                    <a:p>
-                      <a:r>
-                        <a:rPr lang="en-US" sz="1400" dirty="0">
-                          <a:latin typeface="Roboto" panose="02000000000000000000" pitchFamily="2" charset="0"/>
-                          <a:ea typeface="Roboto" panose="02000000000000000000" pitchFamily="2" charset="0"/>
-                        </a:rPr>
-                        <a:t>Adds a key-value pair to the dictionary; throws an exception if the key already exists.</a:t>
+                        <a:t>Adds an element to the HashSet.</a:t>
                       </a:r>
                     </a:p>
                   </a:txBody>
@@ -12690,7 +12745,7 @@
                           <a:latin typeface="Roboto" panose="02000000000000000000" pitchFamily="2" charset="0"/>
                           <a:ea typeface="Roboto" panose="02000000000000000000" pitchFamily="2" charset="0"/>
                         </a:rPr>
-                        <a:t>Removes all key-value pairs from the dictionary.</a:t>
+                        <a:t>Removes all elements from the HashSet.</a:t>
                       </a:r>
                     </a:p>
                   </a:txBody>
@@ -12709,32 +12764,11 @@
                     <a:lstStyle/>
                     <a:p>
                       <a:r>
-                        <a:rPr lang="en-US" sz="1400" b="1" dirty="0" err="1">
-                          <a:latin typeface="Roboto" panose="02000000000000000000" pitchFamily="2" charset="0"/>
-                          <a:ea typeface="Roboto" panose="02000000000000000000" pitchFamily="2" charset="0"/>
-                        </a:rPr>
-                        <a:t>ContainsKey</a:t>
-                      </a:r>
-                      <a:r>
                         <a:rPr lang="en-US" sz="1400" b="1" dirty="0">
                           <a:latin typeface="Roboto" panose="02000000000000000000" pitchFamily="2" charset="0"/>
                           <a:ea typeface="Roboto" panose="02000000000000000000" pitchFamily="2" charset="0"/>
                         </a:rPr>
-                        <a:t>(</a:t>
-                      </a:r>
-                      <a:r>
-                        <a:rPr lang="en-US" sz="1400" b="1" dirty="0" err="1">
-                          <a:latin typeface="Roboto" panose="02000000000000000000" pitchFamily="2" charset="0"/>
-                          <a:ea typeface="Roboto" panose="02000000000000000000" pitchFamily="2" charset="0"/>
-                        </a:rPr>
-                        <a:t>TKey</a:t>
-                      </a:r>
-                      <a:r>
-                        <a:rPr lang="en-US" sz="1400" b="1" dirty="0">
-                          <a:latin typeface="Roboto" panose="02000000000000000000" pitchFamily="2" charset="0"/>
-                          <a:ea typeface="Roboto" panose="02000000000000000000" pitchFamily="2" charset="0"/>
-                        </a:rPr>
-                        <a:t> key)</a:t>
+                        <a:t>Contains()</a:t>
                       </a:r>
                     </a:p>
                   </a:txBody>
@@ -12750,7 +12784,7 @@
                           <a:latin typeface="Roboto" panose="02000000000000000000" pitchFamily="2" charset="0"/>
                           <a:ea typeface="Roboto" panose="02000000000000000000" pitchFamily="2" charset="0"/>
                         </a:rPr>
-                        <a:t>Checks if the specified key exists in the dictionary.</a:t>
+                        <a:t>Checks if a specific element exists in the HashSet.</a:t>
                       </a:r>
                     </a:p>
                   </a:txBody>
@@ -12790,14 +12824,14 @@
                           <a:latin typeface="Roboto" panose="02000000000000000000" pitchFamily="2" charset="0"/>
                           <a:ea typeface="Roboto" panose="02000000000000000000" pitchFamily="2" charset="0"/>
                         </a:rPr>
-                        <a:t>ContainsValue</a:t>
+                        <a:t>CopyTo</a:t>
                       </a:r>
                       <a:r>
                         <a:rPr lang="en-US" sz="1400" b="1" dirty="0">
                           <a:latin typeface="Roboto" panose="02000000000000000000" pitchFamily="2" charset="0"/>
                           <a:ea typeface="Roboto" panose="02000000000000000000" pitchFamily="2" charset="0"/>
                         </a:rPr>
-                        <a:t>(TValue value)</a:t>
+                        <a:t>(array)</a:t>
                       </a:r>
                     </a:p>
                   </a:txBody>
@@ -12830,7 +12864,7 @@
                           <a:latin typeface="Roboto" panose="02000000000000000000" pitchFamily="2" charset="0"/>
                           <a:ea typeface="Roboto" panose="02000000000000000000" pitchFamily="2" charset="0"/>
                         </a:rPr>
-                        <a:t>Checks if the specified value exists in the dictionary.</a:t>
+                        <a:t>Copies all elements of the HashSet into a specified array.</a:t>
                       </a:r>
                     </a:p>
                   </a:txBody>
@@ -12870,21 +12904,7 @@
                           <a:latin typeface="Roboto" panose="02000000000000000000" pitchFamily="2" charset="0"/>
                           <a:ea typeface="Roboto" panose="02000000000000000000" pitchFamily="2" charset="0"/>
                         </a:rPr>
-                        <a:t>Remove(</a:t>
-                      </a:r>
-                      <a:r>
-                        <a:rPr lang="en-US" sz="1400" b="1" dirty="0" err="1">
-                          <a:latin typeface="Roboto" panose="02000000000000000000" pitchFamily="2" charset="0"/>
-                          <a:ea typeface="Roboto" panose="02000000000000000000" pitchFamily="2" charset="0"/>
-                        </a:rPr>
-                        <a:t>TKey</a:t>
-                      </a:r>
-                      <a:r>
-                        <a:rPr lang="en-US" sz="1400" b="1" dirty="0">
-                          <a:latin typeface="Roboto" panose="02000000000000000000" pitchFamily="2" charset="0"/>
-                          <a:ea typeface="Roboto" panose="02000000000000000000" pitchFamily="2" charset="0"/>
-                        </a:rPr>
-                        <a:t> key)</a:t>
+                        <a:t>Remove()</a:t>
                       </a:r>
                     </a:p>
                   </a:txBody>
@@ -12917,7 +12937,7 @@
                           <a:latin typeface="Roboto" panose="02000000000000000000" pitchFamily="2" charset="0"/>
                           <a:ea typeface="Roboto" panose="02000000000000000000" pitchFamily="2" charset="0"/>
                         </a:rPr>
-                        <a:t>Removes the key-value pair associated with the given key; returns true if successful, and false if the key is not found.</a:t>
+                        <a:t>Removes a specific element from the HashSet.</a:t>
                       </a:r>
                     </a:p>
                   </a:txBody>
@@ -12935,10 +12955,10 @@
       </p:graphicFrame>
       <p:pic>
         <p:nvPicPr>
-          <p:cNvPr id="4" name="Picture 3" descr="A screenshot of a computer&#10;&#10;Description automatically generated">
+          <p:cNvPr id="5" name="Picture 4" descr="A group of colorful shapes&#10;&#10;Description automatically generated">
             <a:extLst>
               <a:ext uri="{FF2B5EF4-FFF2-40B4-BE49-F238E27FC236}">
-                <a16:creationId xmlns:a16="http://schemas.microsoft.com/office/drawing/2014/main" id="{D022C5BC-FE6A-DC20-2B6A-041F635E98C4}"/>
+                <a16:creationId xmlns:a16="http://schemas.microsoft.com/office/drawing/2014/main" id="{C076C9B1-99D6-48CA-F730-F4C22187B51D}"/>
               </a:ext>
             </a:extLst>
           </p:cNvPr>
@@ -12955,13 +12975,14 @@
               </a:ext>
             </a:extLst>
           </a:blip>
-          <a:srcRect t="10539" b="27150"/>
-          <a:stretch/>
+          <a:stretch>
+            <a:fillRect/>
+          </a:stretch>
         </p:blipFill>
         <p:spPr>
           <a:xfrm>
-            <a:off x="9358462" y="224155"/>
-            <a:ext cx="2746289" cy="2308325"/>
+            <a:off x="9271000" y="971226"/>
+            <a:ext cx="2292350" cy="2042275"/>
           </a:xfrm>
           <a:prstGeom prst="rect">
             <a:avLst/>
@@ -12971,7 +12992,7 @@
     </p:spTree>
     <p:extLst>
       <p:ext uri="{BB962C8B-B14F-4D97-AF65-F5344CB8AC3E}">
-        <p14:creationId xmlns:p14="http://schemas.microsoft.com/office/powerpoint/2010/main" val="3275052669"/>
+        <p14:creationId xmlns:p14="http://schemas.microsoft.com/office/powerpoint/2010/main" val="4277104657"/>
       </p:ext>
     </p:extLst>
   </p:cSld>
